--- a/MATH189_Midterm_HoangChu.pptx
+++ b/MATH189_Midterm_HoangChu.pptx
@@ -3571,7 +3571,7 @@
           </a:ln>
           <a:extLst>
             <a:ext uri="{C572A759-6A51-4108-AA02-DFA0A04FC94B}">
-              <ma14:wrappingTextBoxFlag xmlns:ma14="http://schemas.microsoft.com/office/mac/drawingml/2011/main" xmlns:a14="http://schemas.microsoft.com/office/drawing/2010/main" xmlns:m="http://schemas.openxmlformats.org/officeDocument/2006/math" xmlns="" val="1"/>
+              <ma14:wrappingTextBoxFlag xmlns="" xmlns:m="http://schemas.openxmlformats.org/officeDocument/2006/math" xmlns:a14="http://schemas.microsoft.com/office/drawing/2010/main" xmlns:ma14="http://schemas.microsoft.com/office/mac/drawingml/2011/main" val="1"/>
             </a:ext>
           </a:extLst>
         </p:spPr>
@@ -3610,7 +3610,7 @@
           </a:ln>
           <a:extLst>
             <a:ext uri="{C572A759-6A51-4108-AA02-DFA0A04FC94B}">
-              <ma14:wrappingTextBoxFlag xmlns:ma14="http://schemas.microsoft.com/office/mac/drawingml/2011/main" xmlns:a14="http://schemas.microsoft.com/office/drawing/2010/main" xmlns:m="http://schemas.openxmlformats.org/officeDocument/2006/math" xmlns="" val="1"/>
+              <ma14:wrappingTextBoxFlag xmlns="" xmlns:m="http://schemas.openxmlformats.org/officeDocument/2006/math" xmlns:a14="http://schemas.microsoft.com/office/drawing/2010/main" xmlns:ma14="http://schemas.microsoft.com/office/mac/drawingml/2011/main" val="1"/>
             </a:ext>
           </a:extLst>
         </p:spPr>
@@ -4645,7 +4645,7 @@
               <a:rPr lang="en-US" sz="7600" dirty="0">
                 <a:latin typeface="+mj-lt"/>
               </a:rPr>
-              <a:t>The First Red Flag: Multi-collinearity</a:t>
+              <a:t>Multi-collinearity: Optimization</a:t>
             </a:r>
             <a:br>
               <a:rPr lang="en-US" sz="3000" dirty="0">
@@ -5367,7 +5367,7 @@
               <a:rPr lang="en-US" sz="7600" dirty="0">
                 <a:latin typeface="+mj-lt"/>
               </a:rPr>
-              <a:t>The First Red Flag: Multi-collinearity</a:t>
+              <a:t>Multi-collinearity: Code</a:t>
             </a:r>
             <a:br>
               <a:rPr lang="en-US" sz="3000" dirty="0">
@@ -5655,7 +5655,13 @@
               <a:rPr lang="en-US" sz="7600" dirty="0">
                 <a:latin typeface="+mj-lt"/>
               </a:rPr>
-              <a:t>Red Flag: Multi-collinearity</a:t>
+              <a:t>Multi-collinearity: </a:t>
+            </a:r>
+            <a:r>
+              <a:rPr lang="en-US" sz="7600">
+                <a:latin typeface="+mj-lt"/>
+              </a:rPr>
+              <a:t>finding lambda</a:t>
             </a:r>
             <a:br>
               <a:rPr lang="en-US" sz="3000" dirty="0">
@@ -6520,7 +6526,7 @@
           </a:prstGeom>
           <a:extLst>
             <a:ext uri="{C572A759-6A51-4108-AA02-DFA0A04FC94B}">
-              <ma14:wrappingTextBoxFlag xmlns:ma14="http://schemas.microsoft.com/office/mac/drawingml/2011/main" xmlns:a14="http://schemas.microsoft.com/office/drawing/2010/main" xmlns:m="http://schemas.openxmlformats.org/officeDocument/2006/math" xmlns="" val="1"/>
+              <ma14:wrappingTextBoxFlag xmlns="" xmlns:m="http://schemas.openxmlformats.org/officeDocument/2006/math" xmlns:a14="http://schemas.microsoft.com/office/drawing/2010/main" xmlns:ma14="http://schemas.microsoft.com/office/mac/drawingml/2011/main" val="1"/>
             </a:ext>
           </a:extLst>
         </p:spPr>
@@ -9979,7 +9985,7 @@
             <a:pPr algn="l"/>
             <a:r>
               <a:rPr lang="en-US" dirty="0"/>
-              <a:t>The First Red Flag: Multi-collinearity</a:t>
+              <a:t>Multicollinearity: Regularize vs Transform Dataset</a:t>
             </a:r>
             <a:br>
               <a:rPr lang="en-US" dirty="0"/>
